--- a/learning-hour-social-time.pptx
+++ b/learning-hour-social-time.pptx
@@ -247,7 +247,7 @@
           <a:p>
             <a:fld id="{42E8F442-CBAF-4E45-BB3A-43F11A347393}" type="datetimeFigureOut">
               <a:rPr lang="de-DE" smtClean="0"/>
-              <a:t>20.11.2024</a:t>
+              <a:t>09.07.2025</a:t>
             </a:fld>
             <a:endParaRPr lang="de-DE"/>
           </a:p>
@@ -415,7 +415,7 @@
           <a:p>
             <a:fld id="{42E8F442-CBAF-4E45-BB3A-43F11A347393}" type="datetimeFigureOut">
               <a:rPr lang="de-DE" smtClean="0"/>
-              <a:t>20.11.2024</a:t>
+              <a:t>09.07.2025</a:t>
             </a:fld>
             <a:endParaRPr lang="de-DE"/>
           </a:p>
@@ -593,7 +593,7 @@
           <a:p>
             <a:fld id="{42E8F442-CBAF-4E45-BB3A-43F11A347393}" type="datetimeFigureOut">
               <a:rPr lang="de-DE" smtClean="0"/>
-              <a:t>20.11.2024</a:t>
+              <a:t>09.07.2025</a:t>
             </a:fld>
             <a:endParaRPr lang="de-DE"/>
           </a:p>
@@ -761,7 +761,7 @@
           <a:p>
             <a:fld id="{42E8F442-CBAF-4E45-BB3A-43F11A347393}" type="datetimeFigureOut">
               <a:rPr lang="de-DE" smtClean="0"/>
-              <a:t>20.11.2024</a:t>
+              <a:t>09.07.2025</a:t>
             </a:fld>
             <a:endParaRPr lang="de-DE"/>
           </a:p>
@@ -1006,7 +1006,7 @@
           <a:p>
             <a:fld id="{42E8F442-CBAF-4E45-BB3A-43F11A347393}" type="datetimeFigureOut">
               <a:rPr lang="de-DE" smtClean="0"/>
-              <a:t>20.11.2024</a:t>
+              <a:t>09.07.2025</a:t>
             </a:fld>
             <a:endParaRPr lang="de-DE"/>
           </a:p>
@@ -1235,7 +1235,7 @@
           <a:p>
             <a:fld id="{42E8F442-CBAF-4E45-BB3A-43F11A347393}" type="datetimeFigureOut">
               <a:rPr lang="de-DE" smtClean="0"/>
-              <a:t>20.11.2024</a:t>
+              <a:t>09.07.2025</a:t>
             </a:fld>
             <a:endParaRPr lang="de-DE"/>
           </a:p>
@@ -1599,7 +1599,7 @@
           <a:p>
             <a:fld id="{42E8F442-CBAF-4E45-BB3A-43F11A347393}" type="datetimeFigureOut">
               <a:rPr lang="de-DE" smtClean="0"/>
-              <a:t>20.11.2024</a:t>
+              <a:t>09.07.2025</a:t>
             </a:fld>
             <a:endParaRPr lang="de-DE"/>
           </a:p>
@@ -1716,7 +1716,7 @@
           <a:p>
             <a:fld id="{42E8F442-CBAF-4E45-BB3A-43F11A347393}" type="datetimeFigureOut">
               <a:rPr lang="de-DE" smtClean="0"/>
-              <a:t>20.11.2024</a:t>
+              <a:t>09.07.2025</a:t>
             </a:fld>
             <a:endParaRPr lang="de-DE"/>
           </a:p>
@@ -1811,7 +1811,7 @@
           <a:p>
             <a:fld id="{42E8F442-CBAF-4E45-BB3A-43F11A347393}" type="datetimeFigureOut">
               <a:rPr lang="de-DE" smtClean="0"/>
-              <a:t>20.11.2024</a:t>
+              <a:t>09.07.2025</a:t>
             </a:fld>
             <a:endParaRPr lang="de-DE"/>
           </a:p>
@@ -2086,7 +2086,7 @@
           <a:p>
             <a:fld id="{42E8F442-CBAF-4E45-BB3A-43F11A347393}" type="datetimeFigureOut">
               <a:rPr lang="de-DE" smtClean="0"/>
-              <a:t>20.11.2024</a:t>
+              <a:t>09.07.2025</a:t>
             </a:fld>
             <a:endParaRPr lang="de-DE"/>
           </a:p>
@@ -2338,7 +2338,7 @@
           <a:p>
             <a:fld id="{42E8F442-CBAF-4E45-BB3A-43F11A347393}" type="datetimeFigureOut">
               <a:rPr lang="de-DE" smtClean="0"/>
-              <a:t>20.11.2024</a:t>
+              <a:t>09.07.2025</a:t>
             </a:fld>
             <a:endParaRPr lang="de-DE"/>
           </a:p>
@@ -2549,7 +2549,7 @@
           <a:p>
             <a:fld id="{42E8F442-CBAF-4E45-BB3A-43F11A347393}" type="datetimeFigureOut">
               <a:rPr lang="de-DE" smtClean="0"/>
-              <a:t>20.11.2024</a:t>
+              <a:t>09.07.2025</a:t>
             </a:fld>
             <a:endParaRPr lang="de-DE"/>
           </a:p>
@@ -3133,23 +3133,23 @@
             </a:r>
             <a:r>
               <a:rPr lang="de-DE" sz="4400" dirty="0"/>
-              <a:t> a time </a:t>
-            </a:r>
-            <a:r>
-              <a:rPr lang="de-DE" sz="4400" dirty="0" err="1"/>
-              <a:t>period</a:t>
-            </a:r>
-            <a:r>
-              <a:rPr lang="de-DE" sz="4400" dirty="0"/>
-              <a:t> </a:t>
-            </a:r>
-            <a:r>
-              <a:rPr lang="de-DE" sz="4400" dirty="0" err="1"/>
-              <a:t>of</a:t>
-            </a:r>
-            <a:r>
-              <a:rPr lang="de-DE" sz="4400" dirty="0"/>
-              <a:t> </a:t>
+              <a:t> an </a:t>
+            </a:r>
+            <a:r>
+              <a:rPr lang="de-DE" sz="4400" dirty="0" err="1"/>
+              <a:t>age</a:t>
+            </a:r>
+            <a:r>
+              <a:rPr lang="de-DE" sz="4400" dirty="0"/>
+              <a:t> </a:t>
+            </a:r>
+            <a:r>
+              <a:rPr lang="de-DE" sz="4400" dirty="0" err="1"/>
+              <a:t>given</a:t>
+            </a:r>
+            <a:r>
+              <a:rPr lang="de-DE" sz="4400" dirty="0"/>
+              <a:t> in </a:t>
             </a:r>
             <a:r>
               <a:rPr lang="de-DE" sz="4400" dirty="0" err="1"/>
